--- a/fourth stage/02-汇报PPT/第四阶段汇报-专利数据关系数据库.pptx
+++ b/fourth stage/02-汇报PPT/第四阶段汇报-专利数据关系数据库.pptx
@@ -4899,7 +4899,7 @@
                 <a:latin typeface="微软雅黑"/>
                 <a:ea typeface="微软雅黑"/>
               </a:rPr>
-              <a:t>汇报人：D 角色（文档整合与分析挖掘）· 小组成员：A / B / C / D 四角色协作</a:t>
+              <a:t>小组成员：A / B / C / D 四角色协作</a:t>
             </a:r>
           </a:p>
           <a:p>
@@ -4940,49 +4940,6 @@
                 <a:ea typeface="微软雅黑"/>
               </a:rPr>
               <a:t>2026 年 10 月</a:t>
-            </a:r>
-          </a:p>
-        </p:txBody>
-      </p:sp>
-      <p:sp>
-        <p:nvSpPr>
-          <p:cNvPr id="8" name="TextBox 7"/>
-          <p:cNvSpPr txBox="1"/>
-          <p:nvPr/>
-        </p:nvSpPr>
-        <p:spPr>
-          <a:xfrm>
-            <a:off x="566928" y="6053328"/>
-            <a:ext cx="11057839" cy="365760"/>
-          </a:xfrm>
-          <a:prstGeom prst="rect">
-            <a:avLst/>
-          </a:prstGeom>
-          <a:noFill/>
-        </p:spPr>
-        <p:txBody>
-          <a:bodyPr wrap="square" anchor="t" lIns="0" rIns="0" tIns="0" bIns="0">
-            <a:spAutoFit/>
-          </a:bodyPr>
-          <a:lstStyle/>
-          <a:p>
-            <a:pPr algn="l">
-              <a:lnSpc>
-                <a:spcPct val="125000"/>
-              </a:lnSpc>
-              <a:spcAft>
-                <a:spcPts val="300"/>
-              </a:spcAft>
-            </a:pPr>
-            <a:r>
-              <a:rPr sz="1200" b="0">
-                <a:solidFill>
-                  <a:srgbClr val="7F9AB5"/>
-                </a:solidFill>
-                <a:latin typeface="微软雅黑"/>
-                <a:ea typeface="微软雅黑"/>
-              </a:rPr>
-              <a:t>小组序号：第 ___ 组（提交前由组长补全） ｜ 组员姓名与学号见报告“小组分工表”</a:t>
             </a:r>
           </a:p>
         </p:txBody>
